--- a/curriculum/unit-2-naming-identity/module-2-1-where-names-come-from.pptx
+++ b/curriculum/unit-2-naming-identity/module-2-1-where-names-come-from.pptx
@@ -2064,7 +2064,7 @@
                 <a:ea typeface="Segoe UI" pitchFamily="34" charset="-122"/>
                 <a:cs typeface="Segoe UI" pitchFamily="34" charset="-120"/>
               </a:rPr>
-              <a:t>Under Latest, service names come from span resource attributes </a:t>
+              <a:t>Under SDv2, service names come from span resource attributes </a:t>
             </a:r>
             <a:pPr indent="0" marL="0">
               <a:buNone/>
@@ -2198,7 +2198,7 @@
                 <a:ea typeface="Segoe UI" pitchFamily="34" charset="-122"/>
                 <a:cs typeface="Segoe UI" pitchFamily="34" charset="-120"/>
               </a:rPr>
-              <a:t>Classic detection residue — process-group fingerprinting (ports, paths, class names)</a:t>
+              <a:t>SDv1 detection residue — process-group fingerprinting (ports, paths, class names)</a:t>
             </a:r>
             <a:endParaRPr lang="en-US" sz="2200" dirty="0"/>
           </a:p>
